--- a/SIH2026-DeltaForce-SIH1733-SAR-Colorization.pptx
+++ b/SIH2026-DeltaForce-SIH1733-SAR-Colorization.pptx
@@ -6751,12 +6751,12 @@
                 <a:spcPts val="0"/>
               </a:spcBef>
               <a:spcAft>
-                <a:spcPts val="1340"/>
+                <a:spcPts val="1280"/>
               </a:spcAft>
               <a:buNone/>
             </a:pPr>
             <a:r>
-              <a:rPr sz="2010" b="1" u="sng">
+              <a:rPr sz="1920" b="1" u="sng">
                 <a:solidFill>
                   <a:srgbClr val="0B3C5D"/>
                 </a:solidFill>
@@ -6781,13 +6781,13 @@
                 <a:spcPts val="0"/>
               </a:spcBef>
               <a:spcAft>
-                <a:spcPts val="1210"/>
+                <a:spcPts val="1150"/>
               </a:spcAft>
               <a:buFont typeface="Arial"/>
               <a:buChar char="▪"/>
             </a:pPr>
             <a:r>
-              <a:rPr sz="1680" b="1" u="none">
+              <a:rPr sz="1600" b="1" u="none">
                 <a:solidFill>
                   <a:srgbClr val="1F2A44"/>
                 </a:solidFill>
@@ -6796,7 +6796,7 @@
               <a:t>The problem in one line:</a:t>
             </a:r>
             <a:r>
-              <a:rPr sz="1680" b="0" u="none">
+              <a:rPr sz="1600" b="0" u="none">
                 <a:solidFill>
                   <a:srgbClr val="1F2A44"/>
                 </a:solidFill>
@@ -6814,13 +6814,13 @@
                 <a:spcPts val="0"/>
               </a:spcBef>
               <a:spcAft>
-                <a:spcPts val="1210"/>
+                <a:spcPts val="1150"/>
               </a:spcAft>
               <a:buFont typeface="Arial"/>
               <a:buChar char="▪"/>
             </a:pPr>
             <a:r>
-              <a:rPr sz="1680" b="1" u="none">
+              <a:rPr sz="1600" b="1" u="none">
                 <a:solidFill>
                   <a:srgbClr val="1F2A44"/>
                 </a:solidFill>
@@ -6829,7 +6829,7 @@
               <a:t>What we build:</a:t>
             </a:r>
             <a:r>
-              <a:rPr sz="1680" b="0" u="none">
+              <a:rPr sz="1600" b="0" u="none">
                 <a:solidFill>
                   <a:srgbClr val="1F2A44"/>
                 </a:solidFill>
@@ -6847,13 +6847,13 @@
                 <a:spcPts val="0"/>
               </a:spcBef>
               <a:spcAft>
-                <a:spcPts val="1210"/>
+                <a:spcPts val="1150"/>
               </a:spcAft>
               <a:buFont typeface="Arial"/>
               <a:buChar char="▪"/>
             </a:pPr>
             <a:r>
-              <a:rPr sz="1680" b="1" u="none">
+              <a:rPr sz="1600" b="1" u="none">
                 <a:solidFill>
                   <a:srgbClr val="1F2A44"/>
                 </a:solidFill>
@@ -6862,7 +6862,7 @@
               <a:t>The catch nobody addresses:</a:t>
             </a:r>
             <a:r>
-              <a:rPr sz="1680" b="0" u="none">
+              <a:rPr sz="1600" b="0" u="none">
                 <a:solidFill>
                   <a:srgbClr val="1F2A44"/>
                 </a:solidFill>
@@ -6880,28 +6880,28 @@
                 <a:spcPts val="0"/>
               </a:spcBef>
               <a:spcAft>
-                <a:spcPts val="1210"/>
+                <a:spcPts val="1150"/>
               </a:spcAft>
               <a:buFont typeface="Arial"/>
               <a:buChar char="▪"/>
             </a:pPr>
             <a:r>
-              <a:rPr sz="1680" b="1" u="none">
+              <a:rPr sz="1600" b="1" u="none">
                 <a:solidFill>
                   <a:srgbClr val="1F2A44"/>
                 </a:solidFill>
                 <a:latin typeface="Arial"/>
               </a:rPr>
-              <a:t>Our answer:</a:t>
-            </a:r>
-            <a:r>
-              <a:rPr sz="1680" b="0" u="none">
+              <a:t>Our USP:</a:t>
+            </a:r>
+            <a:r>
+              <a:rPr sz="1600" b="0" u="none">
                 <a:solidFill>
                   <a:srgbClr val="1F2A44"/>
                 </a:solidFill>
                 <a:latin typeface="Arial"/>
               </a:rPr>
-              <a:t> every output ships with a per-pixel confidence map, and that map GATES every downstream decision. Below threshold the system reports “insufficient evidence” instead of a silent wrong answer.</a:t>
+              <a:t> every pixel carries a CALIBRATED CONFIDENCE, and that map GATES what the system is willing to report. Below threshold it says “insufficient evidence” instead of a silent wrong answer — and where we measured that a capability does not work, we removed it rather than shipping it.</a:t>
             </a:r>
           </a:p>
         </p:txBody>

--- a/SIH2026-DeltaForce-SIH1733-SAR-Colorization.pptx
+++ b/SIH2026-DeltaForce-SIH1733-SAR-Colorization.pptx
@@ -7847,7 +7847,7 @@
                 </a:solidFill>
                 <a:latin typeface="Arial"/>
               </a:rPr>
-              <a:t> L1 + adversarial + frozen-VGG16 perceptual</a:t>
+              <a:t> L1 + adversarial + frozen-VGG16 perceptual + GRADIENT-DIFFERENCE</a:t>
             </a:r>
           </a:p>
           <a:p>

--- a/SIH2026-DeltaForce-SIH1733-SAR-Colorization.pptx
+++ b/SIH2026-DeltaForce-SIH1733-SAR-Colorization.pptx
@@ -6751,12 +6751,12 @@
                 <a:spcPts val="0"/>
               </a:spcBef>
               <a:spcAft>
-                <a:spcPts val="1280"/>
+                <a:spcPts val="1260"/>
               </a:spcAft>
               <a:buNone/>
             </a:pPr>
             <a:r>
-              <a:rPr sz="1920" b="1" u="sng">
+              <a:rPr sz="1889" b="1" u="sng">
                 <a:solidFill>
                   <a:srgbClr val="0B3C5D"/>
                 </a:solidFill>
@@ -6781,13 +6781,13 @@
                 <a:spcPts val="0"/>
               </a:spcBef>
               <a:spcAft>
-                <a:spcPts val="1150"/>
+                <a:spcPts val="1130"/>
               </a:spcAft>
               <a:buFont typeface="Arial"/>
               <a:buChar char="▪"/>
             </a:pPr>
             <a:r>
-              <a:rPr sz="1600" b="1" u="none">
+              <a:rPr sz="1580" b="1" u="none">
                 <a:solidFill>
                   <a:srgbClr val="1F2A44"/>
                 </a:solidFill>
@@ -6796,7 +6796,7 @@
               <a:t>The problem in one line:</a:t>
             </a:r>
             <a:r>
-              <a:rPr sz="1600" b="0" u="none">
+              <a:rPr sz="1580" b="0" u="none">
                 <a:solidFill>
                   <a:srgbClr val="1F2A44"/>
                 </a:solidFill>
@@ -6814,13 +6814,13 @@
                 <a:spcPts val="0"/>
               </a:spcBef>
               <a:spcAft>
-                <a:spcPts val="1150"/>
+                <a:spcPts val="1130"/>
               </a:spcAft>
               <a:buFont typeface="Arial"/>
               <a:buChar char="▪"/>
             </a:pPr>
             <a:r>
-              <a:rPr sz="1600" b="1" u="none">
+              <a:rPr sz="1580" b="1" u="none">
                 <a:solidFill>
                   <a:srgbClr val="1F2A44"/>
                 </a:solidFill>
@@ -6829,7 +6829,7 @@
               <a:t>What we build:</a:t>
             </a:r>
             <a:r>
-              <a:rPr sz="1600" b="0" u="none">
+              <a:rPr sz="1580" b="0" u="none">
                 <a:solidFill>
                   <a:srgbClr val="1F2A44"/>
                 </a:solidFill>
@@ -6847,13 +6847,13 @@
                 <a:spcPts val="0"/>
               </a:spcBef>
               <a:spcAft>
-                <a:spcPts val="1150"/>
+                <a:spcPts val="1130"/>
               </a:spcAft>
               <a:buFont typeface="Arial"/>
               <a:buChar char="▪"/>
             </a:pPr>
             <a:r>
-              <a:rPr sz="1600" b="1" u="none">
+              <a:rPr sz="1580" b="1" u="none">
                 <a:solidFill>
                   <a:srgbClr val="1F2A44"/>
                 </a:solidFill>
@@ -6862,7 +6862,7 @@
               <a:t>The catch nobody addresses:</a:t>
             </a:r>
             <a:r>
-              <a:rPr sz="1600" b="0" u="none">
+              <a:rPr sz="1580" b="0" u="none">
                 <a:solidFill>
                   <a:srgbClr val="1F2A44"/>
                 </a:solidFill>
@@ -6880,13 +6880,13 @@
                 <a:spcPts val="0"/>
               </a:spcBef>
               <a:spcAft>
-                <a:spcPts val="1150"/>
+                <a:spcPts val="1130"/>
               </a:spcAft>
               <a:buFont typeface="Arial"/>
               <a:buChar char="▪"/>
             </a:pPr>
             <a:r>
-              <a:rPr sz="1600" b="1" u="none">
+              <a:rPr sz="1580" b="1" u="none">
                 <a:solidFill>
                   <a:srgbClr val="1F2A44"/>
                 </a:solidFill>
@@ -6895,13 +6895,13 @@
               <a:t>Our USP:</a:t>
             </a:r>
             <a:r>
-              <a:rPr sz="1600" b="0" u="none">
+              <a:rPr sz="1580" b="0" u="none">
                 <a:solidFill>
                   <a:srgbClr val="1F2A44"/>
                 </a:solidFill>
                 <a:latin typeface="Arial"/>
               </a:rPr>
-              <a:t> every pixel carries a CALIBRATED CONFIDENCE, and that map GATES what the system is willing to report. Below threshold it says “insufficient evidence” instead of a silent wrong answer — and where we measured that a capability does not work, we removed it rather than shipping it.</a:t>
+              <a:t> every pixel carries a CALIBRATED CONFIDENCE, and that map GATES what the system is willing to report. Below threshold it says “insufficient evidence” instead of a silent wrong answer. Per-pixel uncertainty on SAR is not new — Copernicus GFM ships a flood likelihood, and 2026 SAR-to-optical work computes one. But they spend it inside the training loss; we calibrate it, show it, and let it GATE the answer.</a:t>
             </a:r>
           </a:p>
         </p:txBody>
@@ -8793,7 +8793,7 @@
                 </a:solidFill>
                 <a:latin typeface="Arial"/>
               </a:rPr>
-              <a:t>Beats its physics baseline on a public benchmark, official split.</a:t>
+              <a:t>Beats its physics baseline on a public benchmark, official split — and we say where we sit: IoU 0.681 is competitive, not leading (SAR-only SOTA ~0.72).</a:t>
             </a:r>
           </a:p>
           <a:p>
@@ -9005,7 +9005,7 @@
                 </a:solidFill>
                 <a:latin typeface="Arial"/>
               </a:rPr>
-              <a:t>Land cover from radar alone does NOT work: built-up scores AUC 0.483, below chance.the quantity being reported.</a:t>
+              <a:t>Land cover from radar alone does NOT work: built-up scores AUC 0.483, below chance against bare soil.</a:t>
             </a:r>
           </a:p>
         </p:txBody>
@@ -9145,7 +9145,7 @@
                 </a:solidFill>
                 <a:latin typeface="Arial"/>
               </a:rPr>
-              <a:t>Learned segmentation where physics fails: IoU 0.550 to 0.681, calibrated.(ECE 0.029 → 0.016).</a:t>
+              <a:t>Learned segmentation where physics fails: IoU 0.550 to 0.681, calibrated (ECE 0.029 → 0.016).</a:t>
             </a:r>
           </a:p>
           <a:p>
@@ -10710,12 +10710,12 @@
                 <a:spcPts val="0"/>
               </a:spcBef>
               <a:spcAft>
-                <a:spcPts val="1440"/>
+                <a:spcPts val="1320"/>
               </a:spcAft>
               <a:buNone/>
             </a:pPr>
             <a:r>
-              <a:rPr sz="1730" b="1" u="none">
+              <a:rPr sz="1580" b="1" u="none">
                 <a:solidFill>
                   <a:srgbClr val="C25E00"/>
                 </a:solidFill>
@@ -10733,13 +10733,13 @@
                 <a:spcPts val="0"/>
               </a:spcBef>
               <a:spcAft>
-                <a:spcPts val="140"/>
+                <a:spcPts val="130"/>
               </a:spcAft>
               <a:buFont typeface="Arial"/>
               <a:buChar char="▪"/>
             </a:pPr>
             <a:r>
-              <a:rPr sz="1510" b="0" u="none">
+              <a:rPr sz="1390" b="0" u="none">
                 <a:solidFill>
                   <a:srgbClr val="1F2A44"/>
                 </a:solidFill>
@@ -10757,12 +10757,12 @@
                 <a:spcPts val="0"/>
               </a:spcBef>
               <a:spcAft>
-                <a:spcPts val="1150"/>
+                <a:spcPts val="1060"/>
               </a:spcAft>
               <a:buNone/>
             </a:pPr>
             <a:r>
-              <a:rPr sz="1440" b="0" u="none">
+              <a:rPr sz="1320" b="0" u="none">
                 <a:solidFill>
                   <a:srgbClr val="C25E00"/>
                 </a:solidFill>
@@ -10780,19 +10780,19 @@
                 <a:spcPts val="0"/>
               </a:spcBef>
               <a:spcAft>
-                <a:spcPts val="140"/>
+                <a:spcPts val="130"/>
               </a:spcAft>
               <a:buFont typeface="Arial"/>
               <a:buChar char="▪"/>
             </a:pPr>
             <a:r>
-              <a:rPr sz="1510" b="0" u="none">
+              <a:rPr sz="1390" b="0" u="none">
                 <a:solidFill>
                   <a:srgbClr val="1F2A44"/>
                 </a:solidFill>
                 <a:latin typeface="Arial"/>
               </a:rPr>
-              <a:t>Wang et al., High-Resolution Image Synthesis with Conditional GANs (pix2pixHD), CVPR 2018</a:t>
+              <a:t>Lee et al., OSCAR — uncertainty-aware SAR-to-optical diffusion, 2026. Closest prior art: uncertainty stays in the training loss, never reaches the user</a:t>
             </a:r>
           </a:p>
           <a:p>
@@ -10804,18 +10804,18 @@
                 <a:spcPts val="0"/>
               </a:spcBef>
               <a:spcAft>
-                <a:spcPts val="1150"/>
+                <a:spcPts val="1060"/>
               </a:spcAft>
               <a:buNone/>
             </a:pPr>
             <a:r>
-              <a:rPr sz="1440" b="0" u="none">
+              <a:rPr sz="1320" b="0" u="none">
                 <a:solidFill>
                   <a:srgbClr val="C25E00"/>
                 </a:solidFill>
                 <a:latin typeface="Arial"/>
               </a:rPr>
-              <a:t>arxiv.org/abs/1711.11585</a:t>
+              <a:t>arxiv.org/abs/2601.06835</a:t>
             </a:r>
           </a:p>
           <a:p>
@@ -10827,13 +10827,13 @@
                 <a:spcPts val="0"/>
               </a:spcBef>
               <a:spcAft>
-                <a:spcPts val="140"/>
+                <a:spcPts val="130"/>
               </a:spcAft>
               <a:buFont typeface="Arial"/>
               <a:buChar char="▪"/>
             </a:pPr>
             <a:r>
-              <a:rPr sz="1510" b="0" u="none">
+              <a:rPr sz="1390" b="0" u="none">
                 <a:solidFill>
                   <a:srgbClr val="1F2A44"/>
                 </a:solidFill>
@@ -10851,12 +10851,12 @@
                 <a:spcPts val="0"/>
               </a:spcBef>
               <a:spcAft>
-                <a:spcPts val="1150"/>
+                <a:spcPts val="1060"/>
               </a:spcAft>
               <a:buNone/>
             </a:pPr>
             <a:r>
-              <a:rPr sz="1440" b="0" u="none">
+              <a:rPr sz="1320" b="0" u="none">
                 <a:solidFill>
                   <a:srgbClr val="C25E00"/>
                 </a:solidFill>
@@ -10874,13 +10874,13 @@
                 <a:spcPts val="0"/>
               </a:spcBef>
               <a:spcAft>
-                <a:spcPts val="140"/>
+                <a:spcPts val="130"/>
               </a:spcAft>
               <a:buFont typeface="Arial"/>
               <a:buChar char="▪"/>
             </a:pPr>
             <a:r>
-              <a:rPr sz="1510" b="0" u="none">
+              <a:rPr sz="1390" b="0" u="none">
                 <a:solidFill>
                   <a:srgbClr val="1F2A44"/>
                 </a:solidFill>
@@ -10898,12 +10898,12 @@
                 <a:spcPts val="0"/>
               </a:spcBef>
               <a:spcAft>
-                <a:spcPts val="1150"/>
+                <a:spcPts val="1060"/>
               </a:spcAft>
               <a:buNone/>
             </a:pPr>
             <a:r>
-              <a:rPr sz="1440" b="0" u="none">
+              <a:rPr sz="1320" b="0" u="none">
                 <a:solidFill>
                   <a:srgbClr val="C25E00"/>
                 </a:solidFill>
@@ -10921,13 +10921,13 @@
                 <a:spcPts val="0"/>
               </a:spcBef>
               <a:spcAft>
-                <a:spcPts val="140"/>
+                <a:spcPts val="130"/>
               </a:spcAft>
               <a:buFont typeface="Arial"/>
               <a:buChar char="▪"/>
             </a:pPr>
             <a:r>
-              <a:rPr sz="1510" b="0" u="none">
+              <a:rPr sz="1390" b="0" u="none">
                 <a:solidFill>
                   <a:srgbClr val="1F2A44"/>
                 </a:solidFill>
@@ -10945,12 +10945,12 @@
                 <a:spcPts val="0"/>
               </a:spcBef>
               <a:spcAft>
-                <a:spcPts val="1150"/>
+                <a:spcPts val="1060"/>
               </a:spcAft>
               <a:buNone/>
             </a:pPr>
             <a:r>
-              <a:rPr sz="1440" b="0" u="none">
+              <a:rPr sz="1320" b="0" u="none">
                 <a:solidFill>
                   <a:srgbClr val="C25E00"/>
                 </a:solidFill>
@@ -11013,12 +11013,12 @@
                 <a:spcPts val="0"/>
               </a:spcBef>
               <a:spcAft>
-                <a:spcPts val="1440"/>
+                <a:spcPts val="1320"/>
               </a:spcAft>
               <a:buNone/>
             </a:pPr>
             <a:r>
-              <a:rPr sz="1730" b="1" u="none">
+              <a:rPr sz="1580" b="1" u="none">
                 <a:solidFill>
                   <a:srgbClr val="C25E00"/>
                 </a:solidFill>
@@ -11036,13 +11036,13 @@
                 <a:spcPts val="0"/>
               </a:spcBef>
               <a:spcAft>
-                <a:spcPts val="140"/>
+                <a:spcPts val="130"/>
               </a:spcAft>
               <a:buFont typeface="Arial"/>
               <a:buChar char="▪"/>
             </a:pPr>
             <a:r>
-              <a:rPr sz="1510" b="0" u="none">
+              <a:rPr sz="1390" b="0" u="none">
                 <a:solidFill>
                   <a:srgbClr val="1F2A44"/>
                 </a:solidFill>
@@ -11060,12 +11060,12 @@
                 <a:spcPts val="0"/>
               </a:spcBef>
               <a:spcAft>
-                <a:spcPts val="1150"/>
+                <a:spcPts val="1060"/>
               </a:spcAft>
               <a:buNone/>
             </a:pPr>
             <a:r>
-              <a:rPr sz="1440" b="0" u="none">
+              <a:rPr sz="1320" b="0" u="none">
                 <a:solidFill>
                   <a:srgbClr val="C25E00"/>
                 </a:solidFill>
@@ -11083,13 +11083,13 @@
                 <a:spcPts val="0"/>
               </a:spcBef>
               <a:spcAft>
-                <a:spcPts val="140"/>
+                <a:spcPts val="130"/>
               </a:spcAft>
               <a:buFont typeface="Arial"/>
               <a:buChar char="▪"/>
             </a:pPr>
             <a:r>
-              <a:rPr sz="1510" b="0" u="none">
+              <a:rPr sz="1390" b="0" u="none">
                 <a:solidFill>
                   <a:srgbClr val="1F2A44"/>
                 </a:solidFill>
@@ -11107,12 +11107,12 @@
                 <a:spcPts val="0"/>
               </a:spcBef>
               <a:spcAft>
-                <a:spcPts val="1150"/>
+                <a:spcPts val="1060"/>
               </a:spcAft>
               <a:buNone/>
             </a:pPr>
             <a:r>
-              <a:rPr sz="1440" b="0" u="none">
+              <a:rPr sz="1320" b="0" u="none">
                 <a:solidFill>
                   <a:srgbClr val="C25E00"/>
                 </a:solidFill>
@@ -11130,13 +11130,13 @@
                 <a:spcPts val="0"/>
               </a:spcBef>
               <a:spcAft>
-                <a:spcPts val="140"/>
+                <a:spcPts val="130"/>
               </a:spcAft>
               <a:buFont typeface="Arial"/>
               <a:buChar char="▪"/>
             </a:pPr>
             <a:r>
-              <a:rPr sz="1510" b="0" u="none">
+              <a:rPr sz="1390" b="0" u="none">
                 <a:solidFill>
                   <a:srgbClr val="1F2A44"/>
                 </a:solidFill>
@@ -11154,12 +11154,12 @@
                 <a:spcPts val="0"/>
               </a:spcBef>
               <a:spcAft>
-                <a:spcPts val="1150"/>
+                <a:spcPts val="1060"/>
               </a:spcAft>
               <a:buNone/>
             </a:pPr>
             <a:r>
-              <a:rPr sz="1440" b="0" u="none">
+              <a:rPr sz="1320" b="0" u="none">
                 <a:solidFill>
                   <a:srgbClr val="C25E00"/>
                 </a:solidFill>
@@ -11177,13 +11177,13 @@
                 <a:spcPts val="0"/>
               </a:spcBef>
               <a:spcAft>
-                <a:spcPts val="140"/>
+                <a:spcPts val="130"/>
               </a:spcAft>
               <a:buFont typeface="Arial"/>
               <a:buChar char="▪"/>
             </a:pPr>
             <a:r>
-              <a:rPr sz="1510" b="0" u="none">
+              <a:rPr sz="1390" b="0" u="none">
                 <a:solidFill>
                   <a:srgbClr val="1F2A44"/>
                 </a:solidFill>
@@ -11201,12 +11201,12 @@
                 <a:spcPts val="0"/>
               </a:spcBef>
               <a:spcAft>
-                <a:spcPts val="1150"/>
+                <a:spcPts val="1060"/>
               </a:spcAft>
               <a:buNone/>
             </a:pPr>
             <a:r>
-              <a:rPr sz="1440" b="0" u="none">
+              <a:rPr sz="1320" b="0" u="none">
                 <a:solidFill>
                   <a:srgbClr val="C25E00"/>
                 </a:solidFill>
@@ -11224,19 +11224,19 @@
                 <a:spcPts val="0"/>
               </a:spcBef>
               <a:spcAft>
-                <a:spcPts val="140"/>
+                <a:spcPts val="130"/>
               </a:spcAft>
               <a:buFont typeface="Arial"/>
               <a:buChar char="▪"/>
             </a:pPr>
             <a:r>
-              <a:rPr sz="1510" b="0" u="none">
+              <a:rPr sz="1390" b="0" u="none">
                 <a:solidFill>
                   <a:srgbClr val="1F2A44"/>
                 </a:solidFill>
                 <a:latin typeface="Arial"/>
               </a:rPr>
-              <a:t>ESA SNAP Toolbox — calibration, speckle filtering, terrain correction</a:t>
+              <a:t>Copernicus GFM — operational global flood service; already ships a per-pixel likelihood, on a mask rather than a colorized image</a:t>
             </a:r>
           </a:p>
           <a:p>
@@ -11248,18 +11248,65 @@
                 <a:spcPts val="0"/>
               </a:spcBef>
               <a:spcAft>
-                <a:spcPts val="1150"/>
+                <a:spcPts val="1060"/>
               </a:spcAft>
               <a:buNone/>
             </a:pPr>
             <a:r>
-              <a:rPr sz="1440" b="0" u="none">
+              <a:rPr sz="1320" b="0" u="none">
                 <a:solidFill>
                   <a:srgbClr val="C25E00"/>
                 </a:solidFill>
                 <a:latin typeface="Arial"/>
               </a:rPr>
-              <a:t>step.esa.int/main/toolboxes/snap</a:t>
+              <a:t>extwiki.eodc.eu/gfm</a:t>
+            </a:r>
+          </a:p>
+          <a:p>
+            <a:pPr marL="182880" indent="-182880" algn="l">
+              <a:lnSpc>
+                <a:spcPct val="104000"/>
+              </a:lnSpc>
+              <a:spcBef>
+                <a:spcPts val="0"/>
+              </a:spcBef>
+              <a:spcAft>
+                <a:spcPts val="130"/>
+              </a:spcAft>
+              <a:buFont typeface="Arial"/>
+              <a:buChar char="▪"/>
+            </a:pPr>
+            <a:r>
+              <a:rPr sz="1390" b="0" u="none">
+                <a:solidFill>
+                  <a:srgbClr val="1F2A44"/>
+                </a:solidFill>
+                <a:latin typeface="Arial"/>
+              </a:rPr>
+              <a:t>ISRO NRSC — operational near-real-time flood inundation via NDEM / Bhuvan</a:t>
+            </a:r>
+          </a:p>
+          <a:p>
+            <a:pPr marL="201168" indent="0" algn="l">
+              <a:lnSpc>
+                <a:spcPct val="104000"/>
+              </a:lnSpc>
+              <a:spcBef>
+                <a:spcPts val="0"/>
+              </a:spcBef>
+              <a:spcAft>
+                <a:spcPts val="1060"/>
+              </a:spcAft>
+              <a:buNone/>
+            </a:pPr>
+            <a:r>
+              <a:rPr sz="1320" b="0" u="none">
+                <a:solidFill>
+                  <a:srgbClr val="C25E00"/>
+                </a:solidFill>
+                <a:latin typeface="Arial"/>
+              </a:rPr>
+              <a:t>nrsc.gov.in</a:t>
             </a:r>
           </a:p>
         </p:txBody>

--- a/SIH2026-DeltaForce-SIH1733-SAR-Colorization.pptx
+++ b/SIH2026-DeltaForce-SIH1733-SAR-Colorization.pptx
@@ -6511,6 +6511,39 @@
                 </a:solidFill>
                 <a:latin typeface="Arial"/>
               </a:rPr>
+              <a:t>Team Number - </a:t>
+            </a:r>
+            <a:r>
+              <a:rPr sz="1950" b="0" u="none">
+                <a:solidFill>
+                  <a:srgbClr val="1F2A44"/>
+                </a:solidFill>
+                <a:latin typeface="Arial"/>
+              </a:rPr>
+              <a:t>71</a:t>
+            </a:r>
+          </a:p>
+          <a:p>
+            <a:pPr marL="182880" indent="-182880" algn="l">
+              <a:lnSpc>
+                <a:spcPct val="108000"/>
+              </a:lnSpc>
+              <a:spcBef>
+                <a:spcPts val="0"/>
+              </a:spcBef>
+              <a:spcAft>
+                <a:spcPts val="1170"/>
+              </a:spcAft>
+              <a:buFont typeface="Arial"/>
+              <a:buChar char="•"/>
+            </a:pPr>
+            <a:r>
+              <a:rPr sz="1950" b="1" u="none">
+                <a:solidFill>
+                  <a:srgbClr val="1F2A44"/>
+                </a:solidFill>
+                <a:latin typeface="Arial"/>
+              </a:rPr>
               <a:t>Team ID - </a:t>
             </a:r>
             <a:r>
